--- a/Microservices/04.1. Microservice Communication.pptx
+++ b/Microservices/04.1. Microservice Communication.pptx
@@ -5,7 +5,7 @@
     <p:sldMasterId id="2147483708" r:id="rId1"/>
   </p:sldMasterIdLst>
   <p:notesMasterIdLst>
-    <p:notesMasterId r:id="rId24"/>
+    <p:notesMasterId r:id="rId27"/>
   </p:notesMasterIdLst>
   <p:sldIdLst>
     <p:sldId id="658" r:id="rId2"/>
@@ -29,7 +29,10 @@
     <p:sldId id="711" r:id="rId20"/>
     <p:sldId id="714" r:id="rId21"/>
     <p:sldId id="715" r:id="rId22"/>
-    <p:sldId id="516" r:id="rId23"/>
+    <p:sldId id="721" r:id="rId23"/>
+    <p:sldId id="722" r:id="rId24"/>
+    <p:sldId id="723" r:id="rId25"/>
+    <p:sldId id="516" r:id="rId26"/>
   </p:sldIdLst>
   <p:sldSz cx="9144000" cy="6858000" type="screen4x3"/>
   <p:notesSz cx="6858000" cy="9144000"/>
@@ -244,7 +247,7 @@
             <a:fld id="{2F0940CE-BE1D-4C40-AF8B-3898A4D1F5EC}" type="datetimeFigureOut">
               <a:rPr lang="en-US" smtClean="0"/>
               <a:pPr/>
-              <a:t>6/2/2021</a:t>
+              <a:t>6/11/2026</a:t>
             </a:fld>
             <a:endParaRPr lang="en-US"/>
           </a:p>
@@ -783,7 +786,7 @@
               <a:pPr>
                 <a:defRPr/>
               </a:pPr>
-              <a:t>6/2/2021</a:t>
+              <a:t>6/11/2026</a:t>
             </a:fld>
             <a:endParaRPr lang="en-US"/>
           </a:p>
@@ -975,7 +978,7 @@
               <a:pPr>
                 <a:defRPr/>
               </a:pPr>
-              <a:t>6/2/2021</a:t>
+              <a:t>6/11/2026</a:t>
             </a:fld>
             <a:endParaRPr lang="en-US"/>
           </a:p>
@@ -1177,7 +1180,7 @@
               <a:pPr>
                 <a:defRPr/>
               </a:pPr>
-              <a:t>6/2/2021</a:t>
+              <a:t>6/11/2026</a:t>
             </a:fld>
             <a:endParaRPr lang="en-US"/>
           </a:p>
@@ -1369,7 +1372,7 @@
               <a:pPr>
                 <a:defRPr/>
               </a:pPr>
-              <a:t>6/2/2021</a:t>
+              <a:t>6/11/2026</a:t>
             </a:fld>
             <a:endParaRPr lang="en-US"/>
           </a:p>
@@ -1637,7 +1640,7 @@
               <a:pPr>
                 <a:defRPr/>
               </a:pPr>
-              <a:t>6/2/2021</a:t>
+              <a:t>6/11/2026</a:t>
             </a:fld>
             <a:endParaRPr lang="en-US"/>
           </a:p>
@@ -1947,7 +1950,7 @@
               <a:pPr>
                 <a:defRPr/>
               </a:pPr>
-              <a:t>6/2/2021</a:t>
+              <a:t>6/11/2026</a:t>
             </a:fld>
             <a:endParaRPr lang="en-US"/>
           </a:p>
@@ -2391,7 +2394,7 @@
               <a:pPr>
                 <a:defRPr/>
               </a:pPr>
-              <a:t>6/2/2021</a:t>
+              <a:t>6/11/2026</a:t>
             </a:fld>
             <a:endParaRPr lang="en-US"/>
           </a:p>
@@ -2531,7 +2534,7 @@
               <a:pPr>
                 <a:defRPr/>
               </a:pPr>
-              <a:t>6/2/2021</a:t>
+              <a:t>6/11/2026</a:t>
             </a:fld>
             <a:endParaRPr lang="en-US"/>
           </a:p>
@@ -2648,7 +2651,7 @@
               <a:pPr>
                 <a:defRPr/>
               </a:pPr>
-              <a:t>6/2/2021</a:t>
+              <a:t>6/11/2026</a:t>
             </a:fld>
             <a:endParaRPr lang="en-US"/>
           </a:p>
@@ -2947,7 +2950,7 @@
               <a:pPr>
                 <a:defRPr/>
               </a:pPr>
-              <a:t>6/2/2021</a:t>
+              <a:t>6/11/2026</a:t>
             </a:fld>
             <a:endParaRPr lang="en-US"/>
           </a:p>
@@ -3225,7 +3228,7 @@
               <a:pPr>
                 <a:defRPr/>
               </a:pPr>
-              <a:t>6/2/2021</a:t>
+              <a:t>6/11/2026</a:t>
             </a:fld>
             <a:endParaRPr lang="en-US"/>
           </a:p>
@@ -3473,7 +3476,7 @@
               <a:pPr>
                 <a:defRPr/>
               </a:pPr>
-              <a:t>6/2/2021</a:t>
+              <a:t>6/11/2026</a:t>
             </a:fld>
             <a:endParaRPr lang="en-US"/>
           </a:p>
@@ -3998,18 +4001,13 @@
           <a:p>
             <a:pPr eaLnBrk="1" hangingPunct="1"/>
             <a:r>
-              <a:rPr lang="en-US" sz="4800" dirty="0" err="1" smtClean="0"/>
+              <a:rPr lang="en-US" sz="6000" dirty="0" err="1" smtClean="0"/>
               <a:t>Microservice</a:t>
             </a:r>
             <a:r>
-              <a:rPr lang="en-US" sz="4800" dirty="0" smtClean="0"/>
-              <a:t> </a:t>
-            </a:r>
-            <a:r>
-              <a:rPr lang="en-US" sz="4800" dirty="0" smtClean="0"/>
-              <a:t>Communication</a:t>
-            </a:r>
-            <a:endParaRPr lang="en-US" sz="4800" dirty="0" smtClean="0"/>
+              <a:rPr lang="en-US" sz="6000" dirty="0" smtClean="0"/>
+              <a:t> Communication</a:t>
+            </a:r>
           </a:p>
         </p:txBody>
       </p:sp>
@@ -4475,11 +4473,7 @@
           <a:p>
             <a:r>
               <a:rPr lang="en-US" dirty="0" smtClean="0"/>
-              <a:t>Circuit Breaker </a:t>
-            </a:r>
-            <a:r>
-              <a:rPr lang="en-US" dirty="0" smtClean="0"/>
-              <a:t>[3]</a:t>
+              <a:t>Circuit Breaker [3]</a:t>
             </a:r>
             <a:endParaRPr lang="en-US" dirty="0"/>
           </a:p>
@@ -5680,6 +5674,349 @@
 </file>
 
 <file path=ppt/slides/slide22.xml><?xml version="1.0" encoding="utf-8"?>
+<p:sld xmlns:a="http://schemas.openxmlformats.org/drawingml/2006/main" xmlns:r="http://schemas.openxmlformats.org/officeDocument/2006/relationships" xmlns:p="http://schemas.openxmlformats.org/presentationml/2006/main">
+  <p:cSld>
+    <p:spTree>
+      <p:nvGrpSpPr>
+        <p:cNvPr id="1" name=""/>
+        <p:cNvGrpSpPr/>
+        <p:nvPr/>
+      </p:nvGrpSpPr>
+      <p:grpSpPr>
+        <a:xfrm>
+          <a:off x="0" y="0"/>
+          <a:ext cx="0" cy="0"/>
+          <a:chOff x="0" y="0"/>
+          <a:chExt cx="0" cy="0"/>
+        </a:xfrm>
+      </p:grpSpPr>
+      <p:pic>
+        <p:nvPicPr>
+          <p:cNvPr id="4" name="Picture 2" descr="https://lh3.ggpht.com/1IfZLL2QDSjZ0wS7sUhaMlsAOS8BBzdR3wZ1WawgRn7KZAM8nEVZYMOUM-lqQb0ikIzp=w300"/>
+          <p:cNvPicPr>
+            <a:picLocks noChangeAspect="1" noChangeArrowheads="1"/>
+          </p:cNvPicPr>
+          <p:nvPr/>
+        </p:nvPicPr>
+        <p:blipFill>
+          <a:blip r:embed="rId2" cstate="print"/>
+          <a:srcRect/>
+          <a:stretch>
+            <a:fillRect/>
+          </a:stretch>
+        </p:blipFill>
+        <p:spPr bwMode="auto">
+          <a:xfrm>
+            <a:off x="3276600" y="1905000"/>
+            <a:ext cx="2857500" cy="2857500"/>
+          </a:xfrm>
+          <a:prstGeom prst="rect">
+            <a:avLst/>
+          </a:prstGeom>
+          <a:noFill/>
+        </p:spPr>
+      </p:pic>
+    </p:spTree>
+  </p:cSld>
+  <p:clrMapOvr>
+    <a:masterClrMapping/>
+  </p:clrMapOvr>
+</p:sld>
+</file>
+
+<file path=ppt/slides/slide23.xml><?xml version="1.0" encoding="utf-8"?>
+<p:sld xmlns:a="http://schemas.openxmlformats.org/drawingml/2006/main" xmlns:r="http://schemas.openxmlformats.org/officeDocument/2006/relationships" xmlns:p="http://schemas.openxmlformats.org/presentationml/2006/main">
+  <p:cSld>
+    <p:spTree>
+      <p:nvGrpSpPr>
+        <p:cNvPr id="1" name=""/>
+        <p:cNvGrpSpPr/>
+        <p:nvPr/>
+      </p:nvGrpSpPr>
+      <p:grpSpPr>
+        <a:xfrm>
+          <a:off x="0" y="0"/>
+          <a:ext cx="0" cy="0"/>
+          <a:chOff x="0" y="0"/>
+          <a:chExt cx="0" cy="0"/>
+        </a:xfrm>
+      </p:grpSpPr>
+      <p:sp>
+        <p:nvSpPr>
+          <p:cNvPr id="2" name="Title 1"/>
+          <p:cNvSpPr>
+            <a:spLocks noGrp="1"/>
+          </p:cNvSpPr>
+          <p:nvPr>
+            <p:ph type="title"/>
+          </p:nvPr>
+        </p:nvSpPr>
+        <p:spPr/>
+        <p:txBody>
+          <a:bodyPr/>
+          <a:lstStyle/>
+          <a:p>
+            <a:r>
+              <a:rPr lang="en-US" dirty="0" err="1" smtClean="0"/>
+              <a:t>OpenAPI</a:t>
+            </a:r>
+            <a:r>
+              <a:rPr lang="en-US" dirty="0" smtClean="0"/>
+              <a:t> Specification</a:t>
+            </a:r>
+            <a:endParaRPr lang="en-US" dirty="0"/>
+          </a:p>
+        </p:txBody>
+      </p:sp>
+      <p:sp>
+        <p:nvSpPr>
+          <p:cNvPr id="3" name="Content Placeholder 2"/>
+          <p:cNvSpPr>
+            <a:spLocks noGrp="1"/>
+          </p:cNvSpPr>
+          <p:nvPr>
+            <p:ph idx="1"/>
+          </p:nvPr>
+        </p:nvSpPr>
+        <p:spPr/>
+        <p:txBody>
+          <a:bodyPr/>
+          <a:lstStyle/>
+          <a:p>
+            <a:r>
+              <a:rPr lang="en-US" sz="2400" dirty="0" smtClean="0">
+                <a:hlinkClick r:id="rId2"/>
+              </a:rPr>
+              <a:t>https://swagger.io/docs/specification/v3_0/about</a:t>
+            </a:r>
+            <a:r>
+              <a:rPr lang="en-US" sz="2400" dirty="0" smtClean="0">
+                <a:hlinkClick r:id="rId2"/>
+              </a:rPr>
+              <a:t>/</a:t>
+            </a:r>
+            <a:endParaRPr lang="en-US" sz="2400" dirty="0" smtClean="0"/>
+          </a:p>
+          <a:p>
+            <a:r>
+              <a:rPr lang="en-US" sz="2400" b="1" dirty="0" err="1" smtClean="0"/>
+              <a:t>OpenAPI</a:t>
+            </a:r>
+            <a:r>
+              <a:rPr lang="en-US" sz="2400" b="1" dirty="0" smtClean="0"/>
+              <a:t> Specification</a:t>
+            </a:r>
+            <a:r>
+              <a:rPr lang="en-US" sz="2400" dirty="0" smtClean="0"/>
+              <a:t> (formerly Swagger Specification) is an API description format for REST APIs. An </a:t>
+            </a:r>
+            <a:r>
+              <a:rPr lang="en-US" sz="2400" dirty="0" err="1" smtClean="0"/>
+              <a:t>OpenAPI</a:t>
+            </a:r>
+            <a:r>
+              <a:rPr lang="en-US" sz="2400" dirty="0" smtClean="0"/>
+              <a:t> file allows you to describe your entire API, including:</a:t>
+            </a:r>
+          </a:p>
+          <a:p>
+            <a:pPr lvl="1"/>
+            <a:r>
+              <a:rPr lang="en-US" sz="2000" dirty="0" smtClean="0"/>
+              <a:t>Available endpoints (/users) and operations on each endpoint (GET /users, POST /users)</a:t>
+            </a:r>
+          </a:p>
+          <a:p>
+            <a:pPr lvl="1"/>
+            <a:r>
+              <a:rPr lang="en-US" sz="2000" dirty="0" smtClean="0"/>
+              <a:t>Operation parameters Input and output for each operation</a:t>
+            </a:r>
+          </a:p>
+          <a:p>
+            <a:pPr lvl="1"/>
+            <a:r>
+              <a:rPr lang="en-US" sz="2000" dirty="0" smtClean="0"/>
+              <a:t>Authentication methods</a:t>
+            </a:r>
+          </a:p>
+          <a:p>
+            <a:pPr lvl="1"/>
+            <a:r>
+              <a:rPr lang="en-US" sz="2000" dirty="0" smtClean="0"/>
+              <a:t>Contact information, license, terms of use, and other information.</a:t>
+            </a:r>
+          </a:p>
+          <a:p>
+            <a:r>
+              <a:rPr lang="en-US" sz="2400" dirty="0" smtClean="0"/>
+              <a:t>API specifications can be written in YAML or JSON</a:t>
+            </a:r>
+            <a:r>
+              <a:rPr lang="en-US" sz="2400" dirty="0" smtClean="0"/>
+              <a:t>.</a:t>
+            </a:r>
+            <a:endParaRPr lang="en-US" sz="2400" dirty="0" smtClean="0"/>
+          </a:p>
+        </p:txBody>
+      </p:sp>
+    </p:spTree>
+  </p:cSld>
+  <p:clrMapOvr>
+    <a:masterClrMapping/>
+  </p:clrMapOvr>
+</p:sld>
+</file>
+
+<file path=ppt/slides/slide24.xml><?xml version="1.0" encoding="utf-8"?>
+<p:sld xmlns:a="http://schemas.openxmlformats.org/drawingml/2006/main" xmlns:r="http://schemas.openxmlformats.org/officeDocument/2006/relationships" xmlns:p="http://schemas.openxmlformats.org/presentationml/2006/main">
+  <p:cSld>
+    <p:spTree>
+      <p:nvGrpSpPr>
+        <p:cNvPr id="1" name=""/>
+        <p:cNvGrpSpPr/>
+        <p:nvPr/>
+      </p:nvGrpSpPr>
+      <p:grpSpPr>
+        <a:xfrm>
+          <a:off x="0" y="0"/>
+          <a:ext cx="0" cy="0"/>
+          <a:chOff x="0" y="0"/>
+          <a:chExt cx="0" cy="0"/>
+        </a:xfrm>
+      </p:grpSpPr>
+      <p:sp>
+        <p:nvSpPr>
+          <p:cNvPr id="2" name="Title 1"/>
+          <p:cNvSpPr>
+            <a:spLocks noGrp="1"/>
+          </p:cNvSpPr>
+          <p:nvPr>
+            <p:ph type="title"/>
+          </p:nvPr>
+        </p:nvSpPr>
+        <p:spPr/>
+        <p:txBody>
+          <a:bodyPr/>
+          <a:lstStyle/>
+          <a:p>
+            <a:r>
+              <a:rPr lang="en-US" dirty="0" smtClean="0"/>
+              <a:t>Why </a:t>
+            </a:r>
+            <a:r>
+              <a:rPr lang="en-US" dirty="0" err="1" smtClean="0"/>
+              <a:t>OpenAPI</a:t>
+            </a:r>
+            <a:r>
+              <a:rPr lang="en-US" smtClean="0"/>
+              <a:t> Specification?</a:t>
+            </a:r>
+            <a:endParaRPr lang="en-US" dirty="0"/>
+          </a:p>
+        </p:txBody>
+      </p:sp>
+      <p:sp>
+        <p:nvSpPr>
+          <p:cNvPr id="3" name="Content Placeholder 2"/>
+          <p:cNvSpPr>
+            <a:spLocks noGrp="1"/>
+          </p:cNvSpPr>
+          <p:nvPr>
+            <p:ph idx="1"/>
+          </p:nvPr>
+        </p:nvSpPr>
+        <p:spPr/>
+        <p:txBody>
+          <a:bodyPr/>
+          <a:lstStyle/>
+          <a:p>
+            <a:r>
+              <a:rPr lang="en-US" sz="2400" dirty="0" smtClean="0">
+                <a:hlinkClick r:id="rId2"/>
+              </a:rPr>
+              <a:t>https://swagger.io/docs/specification/v3_0/about</a:t>
+            </a:r>
+            <a:r>
+              <a:rPr lang="en-US" sz="2400" dirty="0" smtClean="0">
+                <a:hlinkClick r:id="rId2"/>
+              </a:rPr>
+              <a:t>/</a:t>
+            </a:r>
+            <a:endParaRPr lang="en-US" sz="2400" dirty="0" smtClean="0"/>
+          </a:p>
+          <a:p>
+            <a:r>
+              <a:rPr lang="en-US" sz="2400" b="1" dirty="0" err="1" smtClean="0"/>
+              <a:t>OpenAPI</a:t>
+            </a:r>
+            <a:r>
+              <a:rPr lang="en-US" sz="2400" b="1" dirty="0" smtClean="0"/>
+              <a:t> Specification</a:t>
+            </a:r>
+            <a:r>
+              <a:rPr lang="en-US" sz="2400" dirty="0" smtClean="0"/>
+              <a:t> (formerly Swagger Specification) is an API description format for REST APIs. An </a:t>
+            </a:r>
+            <a:r>
+              <a:rPr lang="en-US" sz="2400" dirty="0" err="1" smtClean="0"/>
+              <a:t>OpenAPI</a:t>
+            </a:r>
+            <a:r>
+              <a:rPr lang="en-US" sz="2400" dirty="0" smtClean="0"/>
+              <a:t> file allows you to describe your entire API, including:</a:t>
+            </a:r>
+          </a:p>
+          <a:p>
+            <a:pPr lvl="1"/>
+            <a:r>
+              <a:rPr lang="en-US" sz="2000" dirty="0" smtClean="0"/>
+              <a:t>Available endpoints (/users) and operations on each endpoint (GET /users, POST /users)</a:t>
+            </a:r>
+          </a:p>
+          <a:p>
+            <a:pPr lvl="1"/>
+            <a:r>
+              <a:rPr lang="en-US" sz="2000" dirty="0" smtClean="0"/>
+              <a:t>Operation parameters Input and output for each operation</a:t>
+            </a:r>
+          </a:p>
+          <a:p>
+            <a:pPr lvl="1"/>
+            <a:r>
+              <a:rPr lang="en-US" sz="2000" dirty="0" smtClean="0"/>
+              <a:t>Authentication methods</a:t>
+            </a:r>
+          </a:p>
+          <a:p>
+            <a:pPr lvl="1"/>
+            <a:r>
+              <a:rPr lang="en-US" sz="2000" dirty="0" smtClean="0"/>
+              <a:t>Contact information, license, terms of use, and other information.</a:t>
+            </a:r>
+          </a:p>
+          <a:p>
+            <a:r>
+              <a:rPr lang="en-US" sz="2400" dirty="0" smtClean="0"/>
+              <a:t>API specifications can be written in YAML or JSON</a:t>
+            </a:r>
+            <a:r>
+              <a:rPr lang="en-US" sz="2400" dirty="0" smtClean="0"/>
+              <a:t>.</a:t>
+            </a:r>
+            <a:endParaRPr lang="en-US" sz="2400" dirty="0" smtClean="0"/>
+          </a:p>
+        </p:txBody>
+      </p:sp>
+    </p:spTree>
+  </p:cSld>
+  <p:clrMapOvr>
+    <a:masterClrMapping/>
+  </p:clrMapOvr>
+</p:sld>
+</file>
+
+<file path=ppt/slides/slide25.xml><?xml version="1.0" encoding="utf-8"?>
 <p:sld xmlns:a="http://schemas.openxmlformats.org/drawingml/2006/main" xmlns:r="http://schemas.openxmlformats.org/officeDocument/2006/relationships" xmlns:p="http://schemas.openxmlformats.org/presentationml/2006/main">
   <p:cSld>
     <p:spTree>
@@ -5988,11 +6325,7 @@
             </a:pPr>
             <a:r>
               <a:rPr lang="en-US" sz="1800" dirty="0" smtClean="0"/>
-              <a:t>Michael </a:t>
-            </a:r>
-            <a:r>
-              <a:rPr lang="en-US" sz="1800" dirty="0" smtClean="0"/>
-              <a:t>T. </a:t>
+              <a:t>Michael T. </a:t>
             </a:r>
             <a:r>
               <a:rPr lang="en-US" sz="1800" dirty="0" err="1" smtClean="0"/>

--- a/Microservices/04.1. Microservice Communication.pptx
+++ b/Microservices/04.1. Microservice Communication.pptx
@@ -5909,7 +5909,7 @@
               <a:t>OpenAPI</a:t>
             </a:r>
             <a:r>
-              <a:rPr lang="en-US" smtClean="0"/>
+              <a:rPr lang="en-US" dirty="0" smtClean="0"/>
               <a:t> Specification?</a:t>
             </a:r>
             <a:endParaRPr lang="en-US" dirty="0"/>
@@ -5932,79 +5932,37 @@
           <a:lstStyle/>
           <a:p>
             <a:r>
-              <a:rPr lang="en-US" sz="2400" dirty="0" smtClean="0">
-                <a:hlinkClick r:id="rId2"/>
+              <a:rPr lang="en-US" dirty="0" err="1" smtClean="0"/>
+              <a:t>OpenAPI</a:t>
+            </a:r>
+            <a:r>
+              <a:rPr lang="en-US" dirty="0" smtClean="0"/>
+              <a:t> Specification is used as a </a:t>
+            </a:r>
+            <a:r>
+              <a:rPr lang="en-US" i="1" dirty="0" smtClean="0">
+                <a:solidFill>
+                  <a:srgbClr val="C00000"/>
+                </a:solidFill>
               </a:rPr>
-              <a:t>https://swagger.io/docs/specification/v3_0/about</a:t>
-            </a:r>
-            <a:r>
-              <a:rPr lang="en-US" sz="2400" dirty="0" smtClean="0">
-                <a:hlinkClick r:id="rId2"/>
+              <a:t>machine-readable</a:t>
+            </a:r>
+            <a:r>
+              <a:rPr lang="en-US" dirty="0" smtClean="0"/>
+              <a:t> model of the API, enabling </a:t>
+            </a:r>
+            <a:r>
+              <a:rPr lang="en-US" i="1" dirty="0" smtClean="0">
+                <a:solidFill>
+                  <a:srgbClr val="C00000"/>
+                </a:solidFill>
               </a:rPr>
-              <a:t>/</a:t>
-            </a:r>
-            <a:endParaRPr lang="en-US" sz="2400" dirty="0" smtClean="0"/>
-          </a:p>
-          <a:p>
-            <a:r>
-              <a:rPr lang="en-US" sz="2400" b="1" dirty="0" err="1" smtClean="0"/>
-              <a:t>OpenAPI</a:t>
-            </a:r>
-            <a:r>
-              <a:rPr lang="en-US" sz="2400" b="1" dirty="0" smtClean="0"/>
-              <a:t> Specification</a:t>
-            </a:r>
-            <a:r>
-              <a:rPr lang="en-US" sz="2400" dirty="0" smtClean="0"/>
-              <a:t> (formerly Swagger Specification) is an API description format for REST APIs. An </a:t>
-            </a:r>
-            <a:r>
-              <a:rPr lang="en-US" sz="2400" dirty="0" err="1" smtClean="0"/>
-              <a:t>OpenAPI</a:t>
-            </a:r>
-            <a:r>
-              <a:rPr lang="en-US" sz="2400" dirty="0" smtClean="0"/>
-              <a:t> file allows you to describe your entire API, including:</a:t>
-            </a:r>
-          </a:p>
-          <a:p>
-            <a:pPr lvl="1"/>
-            <a:r>
-              <a:rPr lang="en-US" sz="2000" dirty="0" smtClean="0"/>
-              <a:t>Available endpoints (/users) and operations on each endpoint (GET /users, POST /users)</a:t>
-            </a:r>
-          </a:p>
-          <a:p>
-            <a:pPr lvl="1"/>
-            <a:r>
-              <a:rPr lang="en-US" sz="2000" dirty="0" smtClean="0"/>
-              <a:t>Operation parameters Input and output for each operation</a:t>
-            </a:r>
-          </a:p>
-          <a:p>
-            <a:pPr lvl="1"/>
-            <a:r>
-              <a:rPr lang="en-US" sz="2000" dirty="0" smtClean="0"/>
-              <a:t>Authentication methods</a:t>
-            </a:r>
-          </a:p>
-          <a:p>
-            <a:pPr lvl="1"/>
-            <a:r>
-              <a:rPr lang="en-US" sz="2000" dirty="0" smtClean="0"/>
-              <a:t>Contact information, license, terms of use, and other information.</a:t>
-            </a:r>
-          </a:p>
-          <a:p>
-            <a:r>
-              <a:rPr lang="en-US" sz="2400" dirty="0" smtClean="0"/>
-              <a:t>API specifications can be written in YAML or JSON</a:t>
-            </a:r>
-            <a:r>
-              <a:rPr lang="en-US" sz="2400" dirty="0" smtClean="0"/>
-              <a:t>.</a:t>
-            </a:r>
-            <a:endParaRPr lang="en-US" sz="2400" dirty="0" smtClean="0"/>
+              <a:t>automated</a:t>
+            </a:r>
+            <a:r>
+              <a:rPr lang="en-US" dirty="0" smtClean="0"/>
+              <a:t> black-box generation of test inputs and response oracles.</a:t>
+            </a:r>
           </a:p>
         </p:txBody>
       </p:sp>
